--- a/agent-starter/docs/agent_starter_current_implementation.pptx
+++ b/agent-starter/docs/agent_starter_current_implementation.pptx
@@ -3795,7 +3795,7 @@
             </a:r>
             <a:br/>
             <a:r>
-              <a:t>safety + orchestration</a:t>
+              <a:t>safety + deterministic planner</a:t>
             </a:r>
             <a:br/>
             <a:r>
@@ -5937,7 +5937,7 @@
                 </a:solidFill>
                 <a:latin typeface="Aptos"/>
               </a:rPr>
-              <a:t>thread-pool Agent.run</a:t>
+              <a:t>deterministic plan / agent</a:t>
             </a:r>
           </a:p>
         </p:txBody>
@@ -6154,11 +6154,11 @@
             </a:r>
             <a:br/>
             <a:r>
-              <a:t>Agent.run: session history + long-term memory + retriever</a:t>
+              <a:t>PlannerExecutor: tool steps or Agent.run</a:t>
             </a:r>
             <a:br/>
             <a:r>
-              <a:t>-&gt; calculator or model/cache -&gt; persist both memories</a:t>
+              <a:t>-&gt; model/cache as needed -&gt; persist both memories</a:t>
             </a:r>
           </a:p>
         </p:txBody>
@@ -6874,7 +6874,7 @@
             </a:r>
             <a:br/>
             <a:r>
-              <a:t>status | chunk | final</a:t>
+              <a:t>status | step | chunk | final</a:t>
             </a:r>
             <a:br/>
             <a:r>
@@ -7123,7 +7123,7 @@
                 </a:solidFill>
                 <a:latin typeface="Aptos"/>
               </a:rPr>
-              <a:t>Foreground: status retrieving_context -&gt; status generating -&gt; one chunk event per provider chunk -&gt; final; then persist memories.</a:t>
+              <a:t>Planner: executing_plan -&gt; one step event per action -&gt; final. Model path: retrieving_context -&gt; generating -&gt; chunk events -&gt; final.</a:t>
             </a:r>
           </a:p>
         </p:txBody>
